--- a/NLP_NewsArticleSummary_MP.pptx
+++ b/NLP_NewsArticleSummary_MP.pptx
@@ -117,6 +117,11 @@
       </a:defRPr>
     </a:lvl9pPr>
   </p:defaultTextStyle>
+  <p:extLst>
+    <p:ext uri="{EFAFB233-063F-42B5-8137-9DF3F51BA10A}">
+      <p15:sldGuideLst xmlns:p15="http://schemas.microsoft.com/office/powerpoint/2012/main"/>
+    </p:ext>
+  </p:extLst>
 </p:presentation>
 </file>
 
@@ -1316,8 +1321,8 @@
         </p:nvSpPr>
         <p:spPr>
           <a:xfrm>
-            <a:off x="1106640" y="812880"/>
-            <a:ext cx="5346000" cy="4007520"/>
+            <a:off x="1108075" y="812800"/>
+            <a:ext cx="5343525" cy="4006850"/>
           </a:xfrm>
           <a:prstGeom prst="rect">
             <a:avLst/>
@@ -10937,6 +10942,49 @@
               </a:rPr>
               <a:t>WordCloud</a:t>
             </a:r>
+            <a:endParaRPr lang="en-US" sz="2400" b="0" strike="noStrike" spc="-1" dirty="0">
+              <a:solidFill>
+                <a:srgbClr val="000000"/>
+              </a:solidFill>
+              <a:latin typeface="Times New Roman"/>
+              <a:ea typeface="Times New Roman"/>
+            </a:endParaRPr>
+          </a:p>
+          <a:p>
+            <a:pPr marL="343080" indent="-343080" algn="just">
+              <a:lnSpc>
+                <a:spcPct val="100000"/>
+              </a:lnSpc>
+              <a:spcBef>
+                <a:spcPts val="479"/>
+              </a:spcBef>
+              <a:buClr>
+                <a:srgbClr val="000000"/>
+              </a:buClr>
+              <a:buFont typeface="Arial"/>
+              <a:buChar char="•"/>
+              <a:tabLst>
+                <a:tab pos="0" algn="l"/>
+              </a:tabLst>
+            </a:pPr>
+            <a:r>
+              <a:rPr lang="en-US" sz="2400" b="1" spc="-1" dirty="0">
+                <a:solidFill>
+                  <a:srgbClr val="000000"/>
+                </a:solidFill>
+                <a:latin typeface="Times New Roman"/>
+              </a:rPr>
+              <a:t>Dataset: </a:t>
+            </a:r>
+            <a:r>
+              <a:rPr lang="en-US" sz="2400" spc="-1" dirty="0">
+                <a:solidFill>
+                  <a:srgbClr val="000000"/>
+                </a:solidFill>
+                <a:latin typeface="Times New Roman"/>
+              </a:rPr>
+              <a:t>Custom WSD Dataset - 16 labeled contextual sentences </a:t>
+            </a:r>
             <a:endParaRPr lang="en-IN" sz="2400" b="0" strike="noStrike" spc="-1" dirty="0">
               <a:latin typeface="Arial"/>
             </a:endParaRPr>
@@ -12060,7 +12108,7 @@
                 <a:latin typeface="Times New Roman" panose="02020603050405020304" pitchFamily="18" charset="0"/>
                 <a:cs typeface="Times New Roman" panose="02020603050405020304" pitchFamily="18" charset="0"/>
               </a:rPr>
-              <a:t>Processes articles directly without depending on a fixed dataset, making the system fast and lightweight. </a:t>
+              <a:t>The system processes user-provided articles directly without relying on an external news dataset. The WSD component uses a small custom, manually curated dataset embedded in the code for training the GRU classifier.</a:t>
             </a:r>
             <a:endParaRPr lang="en-IN" sz="2400" b="0" strike="noStrike" spc="-1" dirty="0">
               <a:latin typeface="Times New Roman" panose="02020603050405020304" pitchFamily="18" charset="0"/>
